--- a/decks/triple-b5/triple-b5_ch1_health-disease.pptx
+++ b/decks/triple-b5/triple-b5_ch1_health-disease.pptx
@@ -125,29 +125,29 @@
   <p:extLst>
     <p:ext uri="{521415D9-36F7-43E2-AB2F-B90AF26B5E84}">
       <p14:sectionLst xmlns:p14="http://schemas.microsoft.com/office/powerpoint/2010/main">
-        <p14:section name="Opening" id="{f3b6fb41-2a31-6620-5976-0a5a6a591496}">
+        <p14:section name="Opening" id="{f1e827ff-658f-7f1f-6ce2-4ce4f6e74dca}">
           <p14:sldIdLst>
             <p14:sldId id="256"/>
           </p14:sldIdLst>
         </p14:section>
-        <p14:section name="Gate" id="{6f19754d-0ad4-02db-2f2e-553090d6b910}">
+        <p14:section name="Gate" id="{dd3e5398-c75f-1f32-a5d6-3e7bf72f0450}">
           <p14:sldIdLst>
             <p14:sldId id="257"/>
             <p14:sldId id="258"/>
           </p14:sldIdLst>
         </p14:section>
-        <p14:section name="Pre-teach" id="{d7d6acc0-51fe-509f-ba0b-3485e3ccdf10}">
+        <p14:section name="Pre-teach" id="{c8638fad-3d67-7b9f-ed1c-fc8ed666abc7}">
           <p14:sldIdLst>
             <p14:sldId id="259"/>
           </p14:sldIdLst>
         </p14:section>
-        <p14:section name="Read-along" id="{27412beb-e516-44b7-4f8e-5e8c29892436}">
+        <p14:section name="Read-along" id="{7247ee28-b0f9-deaf-a419-6565216c8573}">
           <p14:sldIdLst>
             <p14:sldId id="260"/>
             <p14:sldId id="261"/>
           </p14:sldIdLst>
         </p14:section>
-        <p14:section name="Teach" id="{fd24d150-76df-5af2-b95f-1c7ce4e6f3ed}">
+        <p14:section name="Teach" id="{0613596d-1676-e82d-8cdb-71faeb8aa08d}">
           <p14:sldIdLst>
             <p14:sldId id="262"/>
             <p14:sldId id="263"/>
@@ -156,7 +156,7 @@
             <p14:sldId id="266"/>
           </p14:sldIdLst>
         </p14:section>
-        <p14:section name="Routes" id="{0ee45392-ac88-8a26-5d95-99a6f7c2820c}">
+        <p14:section name="Routes" id="{85f257b2-ed2a-b69b-65a1-03340912fb35}">
           <p14:sldIdLst>
             <p14:sldId id="267"/>
             <p14:sldId id="268"/>
@@ -164,12 +164,12 @@
             <p14:sldId id="270"/>
           </p14:sldIdLst>
         </p14:section>
-        <p14:section name="Close" id="{4e833b02-454b-6c11-b4a0-6920a0f0ca38}">
+        <p14:section name="Close" id="{be7571b8-3384-6fb5-ae11-a0857e503b45}">
           <p14:sldIdLst>
             <p14:sldId id="271"/>
           </p14:sldIdLst>
         </p14:section>
-        <p14:section name="Answers" id="{a612fa1b-ca46-83fc-3c16-c842c6b4c0b9}">
+        <p14:section name="Answers" id="{27f12d12-5e6b-6eca-79a2-dfc7a6fa5d49}">
           <p14:sldIdLst>
             <p14:sldId id="272"/>
             <p14:sldId id="273"/>
@@ -1324,7 +1324,7 @@
             <a:r>
               <a:rPr lang="en-US" dirty="0"/>
               <a:t>Answers — task 1: Why is it communicable?. Reveal the answer; pupils mark their own work in a different colour, then read the "why" together. Same destination for every lane, so one answer serves the whole class.
-Answer: A   It is caused by a pathogen that can be passed from one person to another
+Answer: D   It is caused by a pathogen that can be passed from one person to another
 Why: A communicable disease is one caused by a pathogen that can be transmitted from one person to another. Flu is caused by a virus that spreads in droplets, so it is communicable.
 Ask a Support pupil to explain one step, and a Stretch pupil to share their extension.</a:t>
             </a:r>
@@ -1597,9 +1597,9 @@
             <a:r>
               <a:rPr lang="en-US" dirty="0"/>
               <a:t>Do now — retrieval. Silent, no notes, no help: recall comes before any support. Give about four minutes.
-1. Which of these is the definition of health used in biology?  →  A   The state of physical and mental well-being
+1. Which of these is the definition of health used in biology?  →  B   The state of physical and mental well-being
 2. A disease that can be passed from one person to another is a ___ disease.  →  communicable
-3. Which of these is a non-communicable disease?  →  A   Coronary heart disease
+3. Which of these is a non-communicable disease?  →  D   Coronary heart disease
 Circulate: who gets 3/3 (Stretch route), 2/3 (Core), 0–1 (Support)? Use this to route pupils later in the lesson.</a:t>
             </a:r>
             <a:endParaRPr lang="en-US" dirty="0"/>
@@ -1689,9 +1689,9 @@
             <a:r>
               <a:rPr lang="en-US" dirty="0"/>
               <a:t>Answers — pupils mark their own in a different colour, then hands up for 3/3, 2/3, 1/3.
-1. A   The state of physical and mental well-being. Health is the state of physical and mental well-being. Disease is one cause of ill health, but not the only one.
+1. B   The state of physical and mental well-being. Health is the state of physical and mental well-being. Disease is one cause of ill health, but not the only one.
 2. communicable. Communicable means infectious: caused by a pathogen that can be transmitted from person to person.
-3. A   Coronary heart disease. Coronary heart disease cannot be passed from one person to another. Measles, flu and Salmonella are all caused by pathogens that spread.
+3. D   Coronary heart disease. Coronary heart disease cannot be passed from one person to another. Measles, flu and Salmonella are all caused by pathogens that spread.
 Say the route each score points to: 3/3 Stretch, 2/3 Core, 0–1 Support. Pupils may choose to move up.</a:t>
             </a:r>
             <a:endParaRPr lang="en-US" dirty="0"/>
@@ -5537,7 +5537,7 @@
                 <a:ea typeface="Calibri" pitchFamily="34" charset="-122"/>
                 <a:cs typeface="Calibri" pitchFamily="34" charset="-120"/>
               </a:rPr>
-              <a:t>It is caused by a pathogen that can be passed from one person to another</a:t>
+              <a:t>It makes people feel very unwell for several days</a:t>
             </a:r>
             <a:endParaRPr lang="en-US" sz="2600" dirty="0"/>
           </a:p>
@@ -5574,7 +5574,7 @@
                 <a:ea typeface="Calibri" pitchFamily="34" charset="-122"/>
                 <a:cs typeface="Calibri" pitchFamily="34" charset="-120"/>
               </a:rPr>
-              <a:t>It makes people feel very unwell for several days</a:t>
+              <a:t>It cannot be passed on to other people</a:t>
             </a:r>
             <a:endParaRPr lang="en-US" sz="2600" dirty="0"/>
           </a:p>
@@ -5648,7 +5648,7 @@
                 <a:ea typeface="Calibri" pitchFamily="34" charset="-122"/>
                 <a:cs typeface="Calibri" pitchFamily="34" charset="-120"/>
               </a:rPr>
-              <a:t>It cannot be passed on to other people</a:t>
+              <a:t>It is caused by a pathogen that can be passed from one person to another</a:t>
             </a:r>
             <a:endParaRPr lang="en-US" sz="2600" dirty="0"/>
           </a:p>
@@ -8480,7 +8480,7 @@
                 <a:ea typeface="Calibri" pitchFamily="34" charset="-122"/>
                 <a:cs typeface="Calibri" pitchFamily="34" charset="-120"/>
               </a:rPr>
-              <a:t>A positive correlation</a:t>
+              <a:t>A straight-line correlation</a:t>
             </a:r>
             <a:endParaRPr lang="en-US" sz="2400" dirty="0"/>
           </a:p>
@@ -8554,7 +8554,7 @@
                 <a:ea typeface="Calibri" pitchFamily="34" charset="-122"/>
                 <a:cs typeface="Calibri" pitchFamily="34" charset="-120"/>
               </a:rPr>
-              <a:t>A straight-line correlation</a:t>
+              <a:t>A positive correlation</a:t>
             </a:r>
             <a:endParaRPr lang="en-US" sz="2400" dirty="0"/>
           </a:p>
@@ -8959,7 +8959,7 @@
                 <a:ea typeface="Cambria" pitchFamily="34" charset="-122"/>
                 <a:cs typeface="Cambria" pitchFamily="34" charset="-120"/>
               </a:rPr>
-              <a:t>A   It is caused by a pathogen that can be passed from one person to another</a:t>
+              <a:t>D   It is caused by a pathogen that can be passed from one person to another</a:t>
             </a:r>
             <a:endParaRPr lang="en-US" sz="1800" dirty="0"/>
           </a:p>
@@ -10411,7 +10411,7 @@
                 <a:ea typeface="Calibri" pitchFamily="34" charset="-122"/>
                 <a:cs typeface="Calibri" pitchFamily="34" charset="-120"/>
               </a:rPr>
-              <a:t>The state of physical and mental well-being</a:t>
+              <a:t>Having no stress in your life</a:t>
             </a:r>
             <a:endParaRPr lang="en-US" sz="1800" dirty="0"/>
           </a:p>
@@ -10448,7 +10448,7 @@
                 <a:ea typeface="Calibri" pitchFamily="34" charset="-122"/>
                 <a:cs typeface="Calibri" pitchFamily="34" charset="-120"/>
               </a:rPr>
-              <a:t>Not having any disease</a:t>
+              <a:t>The state of physical and mental well-being</a:t>
             </a:r>
             <a:endParaRPr lang="en-US" sz="1800" dirty="0"/>
           </a:p>
@@ -10485,7 +10485,7 @@
                 <a:ea typeface="Calibri" pitchFamily="34" charset="-122"/>
                 <a:cs typeface="Calibri" pitchFamily="34" charset="-120"/>
               </a:rPr>
-              <a:t>Being physically fit and strong</a:t>
+              <a:t>Not having any disease</a:t>
             </a:r>
             <a:endParaRPr lang="en-US" sz="1800" dirty="0"/>
           </a:p>
@@ -10522,7 +10522,7 @@
                 <a:ea typeface="Calibri" pitchFamily="34" charset="-122"/>
                 <a:cs typeface="Calibri" pitchFamily="34" charset="-120"/>
               </a:rPr>
-              <a:t>Having no stress in your life</a:t>
+              <a:t>Being physically fit and strong</a:t>
             </a:r>
             <a:endParaRPr lang="en-US" sz="1800" dirty="0"/>
           </a:p>
@@ -10924,7 +10924,7 @@
                 <a:ea typeface="Calibri" pitchFamily="34" charset="-122"/>
                 <a:cs typeface="Calibri" pitchFamily="34" charset="-120"/>
               </a:rPr>
-              <a:t>Coronary heart disease</a:t>
+              <a:t>Measles</a:t>
             </a:r>
             <a:endParaRPr lang="en-US" sz="2200" dirty="0"/>
           </a:p>
@@ -10961,7 +10961,7 @@
                 <a:ea typeface="Calibri" pitchFamily="34" charset="-122"/>
                 <a:cs typeface="Calibri" pitchFamily="34" charset="-120"/>
               </a:rPr>
-              <a:t>Measles</a:t>
+              <a:t>Flu</a:t>
             </a:r>
             <a:endParaRPr lang="en-US" sz="2200" dirty="0"/>
           </a:p>
@@ -10998,7 +10998,7 @@
                 <a:ea typeface="Calibri" pitchFamily="34" charset="-122"/>
                 <a:cs typeface="Calibri" pitchFamily="34" charset="-120"/>
               </a:rPr>
-              <a:t>Flu</a:t>
+              <a:t>Salmonella food poisoning</a:t>
             </a:r>
             <a:endParaRPr lang="en-US" sz="2200" dirty="0"/>
           </a:p>
@@ -11035,7 +11035,7 @@
                 <a:ea typeface="Calibri" pitchFamily="34" charset="-122"/>
                 <a:cs typeface="Calibri" pitchFamily="34" charset="-120"/>
               </a:rPr>
-              <a:t>Salmonella food poisoning</a:t>
+              <a:t>Coronary heart disease</a:t>
             </a:r>
             <a:endParaRPr lang="en-US" sz="2200" dirty="0"/>
           </a:p>
@@ -11436,7 +11436,7 @@
                 <a:ea typeface="Calibri" pitchFamily="34" charset="-122"/>
                 <a:cs typeface="Calibri" pitchFamily="34" charset="-120"/>
               </a:rPr>
-              <a:t>A   The state of physical and mental well-being</a:t>
+              <a:t>B   The state of physical and mental well-being</a:t>
             </a:r>
             <a:endParaRPr lang="en-US" sz="2200" dirty="0"/>
           </a:p>
@@ -11936,7 +11936,7 @@
                 <a:ea typeface="Calibri" pitchFamily="34" charset="-122"/>
                 <a:cs typeface="Calibri" pitchFamily="34" charset="-120"/>
               </a:rPr>
-              <a:t>A   Coronary heart disease</a:t>
+              <a:t>D   Coronary heart disease</a:t>
             </a:r>
             <a:endParaRPr lang="en-US" sz="2200" dirty="0"/>
           </a:p>

--- a/decks/triple-b5/triple-b5_ch1_health-disease.pptx
+++ b/decks/triple-b5/triple-b5_ch1_health-disease.pptx
@@ -125,29 +125,29 @@
   <p:extLst>
     <p:ext uri="{521415D9-36F7-43E2-AB2F-B90AF26B5E84}">
       <p14:sectionLst xmlns:p14="http://schemas.microsoft.com/office/powerpoint/2010/main">
-        <p14:section name="Opening" id="{f1e827ff-658f-7f1f-6ce2-4ce4f6e74dca}">
+        <p14:section name="Opening" id="{bd511d0e-ce27-4eff-01f1-6fd557e4d8cc}">
           <p14:sldIdLst>
             <p14:sldId id="256"/>
           </p14:sldIdLst>
         </p14:section>
-        <p14:section name="Gate" id="{dd3e5398-c75f-1f32-a5d6-3e7bf72f0450}">
+        <p14:section name="Gate" id="{d5c80c73-fec2-9325-ce37-b25d926a9892}">
           <p14:sldIdLst>
             <p14:sldId id="257"/>
             <p14:sldId id="258"/>
           </p14:sldIdLst>
         </p14:section>
-        <p14:section name="Pre-teach" id="{c8638fad-3d67-7b9f-ed1c-fc8ed666abc7}">
+        <p14:section name="Pre-teach" id="{7a0c4a54-8883-0e05-3053-19381fb7d767}">
           <p14:sldIdLst>
             <p14:sldId id="259"/>
           </p14:sldIdLst>
         </p14:section>
-        <p14:section name="Read-along" id="{7247ee28-b0f9-deaf-a419-6565216c8573}">
+        <p14:section name="Read-along" id="{b26f9486-8968-8b82-3344-e89e25d519ac}">
           <p14:sldIdLst>
             <p14:sldId id="260"/>
             <p14:sldId id="261"/>
           </p14:sldIdLst>
         </p14:section>
-        <p14:section name="Teach" id="{0613596d-1676-e82d-8cdb-71faeb8aa08d}">
+        <p14:section name="Teach" id="{05abe0b4-5aea-283c-a23e-3bd1eda75e12}">
           <p14:sldIdLst>
             <p14:sldId id="262"/>
             <p14:sldId id="263"/>
@@ -156,7 +156,7 @@
             <p14:sldId id="266"/>
           </p14:sldIdLst>
         </p14:section>
-        <p14:section name="Routes" id="{85f257b2-ed2a-b69b-65a1-03340912fb35}">
+        <p14:section name="Routes" id="{bdce7d1a-01b4-b4fa-6b68-54bab2e93c2d}">
           <p14:sldIdLst>
             <p14:sldId id="267"/>
             <p14:sldId id="268"/>
@@ -164,12 +164,12 @@
             <p14:sldId id="270"/>
           </p14:sldIdLst>
         </p14:section>
-        <p14:section name="Close" id="{be7571b8-3384-6fb5-ae11-a0857e503b45}">
+        <p14:section name="Close" id="{08b4b4dc-b7e5-00f7-46d0-cb3d98c28fd1}">
           <p14:sldIdLst>
             <p14:sldId id="271"/>
           </p14:sldIdLst>
         </p14:section>
-        <p14:section name="Answers" id="{27f12d12-5e6b-6eca-79a2-dfc7a6fa5d49}">
+        <p14:section name="Answers" id="{f18b8183-220c-4a9e-338c-972a2b2667c0}">
           <p14:sldIdLst>
             <p14:sldId id="272"/>
             <p14:sldId id="273"/>
